--- a/figs/thrust2.2-rtos-attestation.pptx
+++ b/figs/thrust2.2-rtos-attestation.pptx
@@ -208,7 +208,7 @@
           <a:p>
             <a:fld id="{D5F8EC97-77C3-494D-BB25-0644EDFE268B}" type="datetimeFigureOut">
               <a:rPr lang="en-US" smtClean="0"/>
-              <a:t>9/4/26</a:t>
+              <a:t>9/25/26</a:t>
             </a:fld>
             <a:endParaRPr lang="en-US"/>
           </a:p>
@@ -743,7 +743,7 @@
           <a:p>
             <a:fld id="{5BCAD085-E8A6-8845-BD4E-CB4CCA059FC4}" type="datetimeFigureOut">
               <a:rPr lang="en-US" smtClean="0"/>
-              <a:t>9/4/26</a:t>
+              <a:t>9/25/26</a:t>
             </a:fld>
             <a:endParaRPr lang="en-US"/>
           </a:p>
@@ -911,7 +911,7 @@
           <a:p>
             <a:fld id="{5BCAD085-E8A6-8845-BD4E-CB4CCA059FC4}" type="datetimeFigureOut">
               <a:rPr lang="en-US" smtClean="0"/>
-              <a:t>9/4/26</a:t>
+              <a:t>9/25/26</a:t>
             </a:fld>
             <a:endParaRPr lang="en-US"/>
           </a:p>
@@ -1089,7 +1089,7 @@
           <a:p>
             <a:fld id="{5BCAD085-E8A6-8845-BD4E-CB4CCA059FC4}" type="datetimeFigureOut">
               <a:rPr lang="en-US" smtClean="0"/>
-              <a:t>9/4/26</a:t>
+              <a:t>9/25/26</a:t>
             </a:fld>
             <a:endParaRPr lang="en-US"/>
           </a:p>
@@ -1257,7 +1257,7 @@
           <a:p>
             <a:fld id="{5BCAD085-E8A6-8845-BD4E-CB4CCA059FC4}" type="datetimeFigureOut">
               <a:rPr lang="en-US" smtClean="0"/>
-              <a:t>9/4/26</a:t>
+              <a:t>9/25/26</a:t>
             </a:fld>
             <a:endParaRPr lang="en-US"/>
           </a:p>
@@ -1502,7 +1502,7 @@
           <a:p>
             <a:fld id="{5BCAD085-E8A6-8845-BD4E-CB4CCA059FC4}" type="datetimeFigureOut">
               <a:rPr lang="en-US" smtClean="0"/>
-              <a:t>9/4/26</a:t>
+              <a:t>9/25/26</a:t>
             </a:fld>
             <a:endParaRPr lang="en-US"/>
           </a:p>
@@ -1787,7 +1787,7 @@
           <a:p>
             <a:fld id="{5BCAD085-E8A6-8845-BD4E-CB4CCA059FC4}" type="datetimeFigureOut">
               <a:rPr lang="en-US" smtClean="0"/>
-              <a:t>9/4/26</a:t>
+              <a:t>9/25/26</a:t>
             </a:fld>
             <a:endParaRPr lang="en-US"/>
           </a:p>
@@ -2206,7 +2206,7 @@
           <a:p>
             <a:fld id="{5BCAD085-E8A6-8845-BD4E-CB4CCA059FC4}" type="datetimeFigureOut">
               <a:rPr lang="en-US" smtClean="0"/>
-              <a:t>9/4/26</a:t>
+              <a:t>9/25/26</a:t>
             </a:fld>
             <a:endParaRPr lang="en-US"/>
           </a:p>
@@ -2323,7 +2323,7 @@
           <a:p>
             <a:fld id="{5BCAD085-E8A6-8845-BD4E-CB4CCA059FC4}" type="datetimeFigureOut">
               <a:rPr lang="en-US" smtClean="0"/>
-              <a:t>9/4/26</a:t>
+              <a:t>9/25/26</a:t>
             </a:fld>
             <a:endParaRPr lang="en-US"/>
           </a:p>
@@ -2418,7 +2418,7 @@
           <a:p>
             <a:fld id="{5BCAD085-E8A6-8845-BD4E-CB4CCA059FC4}" type="datetimeFigureOut">
               <a:rPr lang="en-US" smtClean="0"/>
-              <a:t>9/4/26</a:t>
+              <a:t>9/25/26</a:t>
             </a:fld>
             <a:endParaRPr lang="en-US"/>
           </a:p>
@@ -2693,7 +2693,7 @@
           <a:p>
             <a:fld id="{5BCAD085-E8A6-8845-BD4E-CB4CCA059FC4}" type="datetimeFigureOut">
               <a:rPr lang="en-US" smtClean="0"/>
-              <a:t>9/4/26</a:t>
+              <a:t>9/25/26</a:t>
             </a:fld>
             <a:endParaRPr lang="en-US"/>
           </a:p>
@@ -2945,7 +2945,7 @@
           <a:p>
             <a:fld id="{5BCAD085-E8A6-8845-BD4E-CB4CCA059FC4}" type="datetimeFigureOut">
               <a:rPr lang="en-US" smtClean="0"/>
-              <a:t>9/4/26</a:t>
+              <a:t>9/25/26</a:t>
             </a:fld>
             <a:endParaRPr lang="en-US"/>
           </a:p>
@@ -3156,7 +3156,7 @@
           <a:p>
             <a:fld id="{5BCAD085-E8A6-8845-BD4E-CB4CCA059FC4}" type="datetimeFigureOut">
               <a:rPr lang="en-US" smtClean="0"/>
-              <a:t>9/4/26</a:t>
+              <a:t>9/25/26</a:t>
             </a:fld>
             <a:endParaRPr lang="en-US"/>
           </a:p>
@@ -5119,7 +5119,7 @@
                   <a:schemeClr val="tx1"/>
                 </a:solidFill>
               </a:rPr>
-              <a:t>Occurrence Trace</a:t>
+              <a:t>Trace Commit</a:t>
             </a:r>
           </a:p>
         </p:txBody>
